--- a/MIT/udl/Slides/CM20315_13_Unsupervised.pptx
+++ b/MIT/udl/Slides/CM20315_13_Unsupervised.pptx
@@ -116,6 +116,11 @@
       </a:defRPr>
     </a:lvl9pPr>
   </p:defaultTextStyle>
+  <p:extLst>
+    <p:ext uri="{EFAFB233-063F-42B5-8137-9DF3F51BA10A}">
+      <p15:sldGuideLst xmlns:p15="http://schemas.microsoft.com/office/powerpoint/2012/main"/>
+    </p:ext>
+  </p:extLst>
 </p:presentation>
 </file>
 
@@ -274,7 +279,7 @@
           <a:p>
             <a:fld id="{782A534B-3F5A-5E45-AA7D-6FD169E8BD7B}" type="datetimeFigureOut">
               <a:rPr lang="en-US" smtClean="0"/>
-              <a:t>12/11/22</a:t>
+              <a:t>8/15/26</a:t>
             </a:fld>
             <a:endParaRPr lang="en-US"/>
           </a:p>
@@ -472,7 +477,7 @@
           <a:p>
             <a:fld id="{782A534B-3F5A-5E45-AA7D-6FD169E8BD7B}" type="datetimeFigureOut">
               <a:rPr lang="en-US" smtClean="0"/>
-              <a:t>12/11/22</a:t>
+              <a:t>8/15/26</a:t>
             </a:fld>
             <a:endParaRPr lang="en-US"/>
           </a:p>
@@ -680,7 +685,7 @@
           <a:p>
             <a:fld id="{782A534B-3F5A-5E45-AA7D-6FD169E8BD7B}" type="datetimeFigureOut">
               <a:rPr lang="en-US" smtClean="0"/>
-              <a:t>12/11/22</a:t>
+              <a:t>8/15/26</a:t>
             </a:fld>
             <a:endParaRPr lang="en-US"/>
           </a:p>
@@ -878,7 +883,7 @@
           <a:p>
             <a:fld id="{782A534B-3F5A-5E45-AA7D-6FD169E8BD7B}" type="datetimeFigureOut">
               <a:rPr lang="en-US" smtClean="0"/>
-              <a:t>12/11/22</a:t>
+              <a:t>8/15/26</a:t>
             </a:fld>
             <a:endParaRPr lang="en-US"/>
           </a:p>
@@ -1153,7 +1158,7 @@
           <a:p>
             <a:fld id="{782A534B-3F5A-5E45-AA7D-6FD169E8BD7B}" type="datetimeFigureOut">
               <a:rPr lang="en-US" smtClean="0"/>
-              <a:t>12/11/22</a:t>
+              <a:t>8/15/26</a:t>
             </a:fld>
             <a:endParaRPr lang="en-US"/>
           </a:p>
@@ -1418,7 +1423,7 @@
           <a:p>
             <a:fld id="{782A534B-3F5A-5E45-AA7D-6FD169E8BD7B}" type="datetimeFigureOut">
               <a:rPr lang="en-US" smtClean="0"/>
-              <a:t>12/11/22</a:t>
+              <a:t>8/15/26</a:t>
             </a:fld>
             <a:endParaRPr lang="en-US"/>
           </a:p>
@@ -1830,7 +1835,7 @@
           <a:p>
             <a:fld id="{782A534B-3F5A-5E45-AA7D-6FD169E8BD7B}" type="datetimeFigureOut">
               <a:rPr lang="en-US" smtClean="0"/>
-              <a:t>12/11/22</a:t>
+              <a:t>8/15/26</a:t>
             </a:fld>
             <a:endParaRPr lang="en-US"/>
           </a:p>
@@ -1971,7 +1976,7 @@
           <a:p>
             <a:fld id="{782A534B-3F5A-5E45-AA7D-6FD169E8BD7B}" type="datetimeFigureOut">
               <a:rPr lang="en-US" smtClean="0"/>
-              <a:t>12/11/22</a:t>
+              <a:t>8/15/26</a:t>
             </a:fld>
             <a:endParaRPr lang="en-US"/>
           </a:p>
@@ -2084,7 +2089,7 @@
           <a:p>
             <a:fld id="{782A534B-3F5A-5E45-AA7D-6FD169E8BD7B}" type="datetimeFigureOut">
               <a:rPr lang="en-US" smtClean="0"/>
-              <a:t>12/11/22</a:t>
+              <a:t>8/15/26</a:t>
             </a:fld>
             <a:endParaRPr lang="en-US"/>
           </a:p>
@@ -2395,7 +2400,7 @@
           <a:p>
             <a:fld id="{782A534B-3F5A-5E45-AA7D-6FD169E8BD7B}" type="datetimeFigureOut">
               <a:rPr lang="en-US" smtClean="0"/>
-              <a:t>12/11/22</a:t>
+              <a:t>8/15/26</a:t>
             </a:fld>
             <a:endParaRPr lang="en-US"/>
           </a:p>
@@ -2683,7 +2688,7 @@
           <a:p>
             <a:fld id="{782A534B-3F5A-5E45-AA7D-6FD169E8BD7B}" type="datetimeFigureOut">
               <a:rPr lang="en-US" smtClean="0"/>
-              <a:t>12/11/22</a:t>
+              <a:t>8/15/26</a:t>
             </a:fld>
             <a:endParaRPr lang="en-US"/>
           </a:p>
@@ -2924,7 +2929,7 @@
           <a:p>
             <a:fld id="{782A534B-3F5A-5E45-AA7D-6FD169E8BD7B}" type="datetimeFigureOut">
               <a:rPr lang="en-US" smtClean="0"/>
-              <a:t>12/11/22</a:t>
+              <a:t>8/15/26</a:t>
             </a:fld>
             <a:endParaRPr lang="en-US"/>
           </a:p>
@@ -3624,7 +3629,7 @@
         </p:blipFill>
         <p:spPr>
           <a:xfrm>
-            <a:off x="642114" y="487111"/>
+            <a:off x="631604" y="487111"/>
             <a:ext cx="10672517" cy="6033432"/>
           </a:xfrm>
           <a:prstGeom prst="rect">
@@ -3941,7 +3946,7 @@
         </p:blipFill>
         <p:spPr>
           <a:xfrm>
-            <a:off x="1511300" y="1542030"/>
+            <a:off x="1048845" y="1690688"/>
             <a:ext cx="9169400" cy="3416300"/>
           </a:xfrm>
         </p:spPr>
@@ -3985,7 +3990,11 @@
               <a:buChar char="•"/>
             </a:pPr>
             <a:r>
-              <a:rPr lang="en-US" dirty="0"/>
+              <a:rPr lang="en-US" dirty="0">
+                <a:highlight>
+                  <a:srgbClr val="FF00FF"/>
+                </a:highlight>
+              </a:rPr>
               <a:t>Open research area.  </a:t>
             </a:r>
           </a:p>
@@ -4046,10 +4055,10 @@
           <p:nvPr/>
         </p:nvPicPr>
         <p:blipFill>
-          <a:blip r:embed="rId2">
+          <a:blip>
             <a:extLst>
               <a:ext uri="{96DAC541-7B7A-43D3-8B79-37D633B846F1}">
-                <asvg:svgBlip xmlns:asvg="http://schemas.microsoft.com/office/drawing/2016/SVG/main" r:embed="rId3"/>
+                <asvg:svgBlip xmlns:asvg="http://schemas.microsoft.com/office/drawing/2016/SVG/main" r:embed="rId2"/>
               </a:ext>
             </a:extLst>
           </a:blip>
@@ -4112,10 +4121,10 @@
           <p:nvPr/>
         </p:nvPicPr>
         <p:blipFill>
-          <a:blip r:embed="rId2">
+          <a:blip>
             <a:extLst>
               <a:ext uri="{96DAC541-7B7A-43D3-8B79-37D633B846F1}">
-                <asvg:svgBlip xmlns:asvg="http://schemas.microsoft.com/office/drawing/2016/SVG/main" r:embed="rId3"/>
+                <asvg:svgBlip xmlns:asvg="http://schemas.microsoft.com/office/drawing/2016/SVG/main" r:embed="rId2"/>
               </a:ext>
             </a:extLst>
           </a:blip>
@@ -4259,7 +4268,7 @@
         <p:spPr/>
         <p:txBody>
           <a:bodyPr>
-            <a:normAutofit lnSpcReduction="10000"/>
+            <a:normAutofit fontScale="92500" lnSpcReduction="10000"/>
           </a:bodyPr>
           <a:lstStyle/>
           <a:p>
@@ -4271,8 +4280,27 @@
           <a:p>
             <a:r>
               <a:rPr lang="en-US" dirty="0"/>
-              <a:t>Unsupervised learning only has the data x</a:t>
-            </a:r>
+              <a:t>Unsupervised learning only has the </a:t>
+            </a:r>
+            <a:r>
+              <a:rPr lang="en-US"/>
+              <a:t>data x</a:t>
+            </a:r>
+          </a:p>
+          <a:p>
+            <a:r>
+              <a:rPr lang="en-US">
+                <a:highlight>
+                  <a:srgbClr val="FF00FF"/>
+                </a:highlight>
+              </a:rPr>
+              <a:t>Impossible for me to remember these terms</a:t>
+            </a:r>
+            <a:endParaRPr lang="en-US" dirty="0">
+              <a:highlight>
+                <a:srgbClr val="FF00FF"/>
+              </a:highlight>
+            </a:endParaRPr>
           </a:p>
           <a:p>
             <a:r>
@@ -4406,7 +4434,7 @@
         <p:spPr>
           <a:xfrm>
             <a:off x="7691215" y="1230594"/>
-            <a:ext cx="3956703" cy="1239141"/>
+            <a:ext cx="3956703" cy="4801314"/>
           </a:xfrm>
           <a:prstGeom prst="rect">
             <a:avLst/>
@@ -4420,15 +4448,107 @@
           <a:lstStyle/>
           <a:p>
             <a:r>
-              <a:rPr lang="en-US" dirty="0"/>
-              <a:t>Generative = can generate new examples</a:t>
-            </a:r>
-          </a:p>
-          <a:p>
-            <a:r>
-              <a:rPr lang="en-US" dirty="0"/>
-              <a:t>Probabilistic = can assign probability to data examples</a:t>
-            </a:r>
+              <a:rPr lang="en-US">
+                <a:highlight>
+                  <a:srgbClr val="FFFF00"/>
+                </a:highlight>
+              </a:rPr>
+              <a:t>Only Terms:</a:t>
+            </a:r>
+          </a:p>
+          <a:p>
+            <a:endParaRPr lang="en-US">
+              <a:highlight>
+                <a:srgbClr val="FFFF00"/>
+              </a:highlight>
+            </a:endParaRPr>
+          </a:p>
+          <a:p>
+            <a:r>
+              <a:rPr lang="en-US">
+                <a:highlight>
+                  <a:srgbClr val="00FF00"/>
+                </a:highlight>
+              </a:rPr>
+              <a:t>Generative </a:t>
+            </a:r>
+            <a:r>
+              <a:rPr lang="en-US" dirty="0">
+                <a:highlight>
+                  <a:srgbClr val="00FF00"/>
+                </a:highlight>
+              </a:rPr>
+              <a:t>= can generate </a:t>
+            </a:r>
+            <a:r>
+              <a:rPr lang="en-US">
+                <a:highlight>
+                  <a:srgbClr val="00FF00"/>
+                </a:highlight>
+              </a:rPr>
+              <a:t>new examples.. </a:t>
+            </a:r>
+            <a:r>
+              <a:rPr lang="en-US">
+                <a:highlight>
+                  <a:srgbClr val="FF00FF"/>
+                </a:highlight>
+              </a:rPr>
+              <a:t>Probabilistic </a:t>
+            </a:r>
+            <a:r>
+              <a:rPr lang="en-US" dirty="0">
+                <a:highlight>
+                  <a:srgbClr val="FF00FF"/>
+                </a:highlight>
+              </a:rPr>
+              <a:t>= can assign probability to </a:t>
+            </a:r>
+            <a:r>
+              <a:rPr lang="en-US">
+                <a:highlight>
+                  <a:srgbClr val="FF00FF"/>
+                </a:highlight>
+              </a:rPr>
+              <a:t>data examples by revealing the internal structure of a dataset (e.g., by</a:t>
+            </a:r>
+          </a:p>
+          <a:p>
+            <a:r>
+              <a:rPr lang="en-US">
+                <a:highlight>
+                  <a:srgbClr val="FF00FF"/>
+                </a:highlight>
+              </a:rPr>
+              <a:t>dividing it into coherent clusters) or to distinguish whether new examples belong to the</a:t>
+            </a:r>
+          </a:p>
+          <a:p>
+            <a:r>
+              <a:rPr lang="en-US">
+                <a:highlight>
+                  <a:srgbClr val="FF00FF"/>
+                </a:highlight>
+              </a:rPr>
+              <a:t>same dataset or are outliers. Learn the underlying probabilistic model distribution</a:t>
+            </a:r>
+          </a:p>
+          <a:p>
+            <a:r>
+              <a:rPr lang="en-US">
+                <a:highlight>
+                  <a:srgbClr val="FF00FF"/>
+                </a:highlight>
+              </a:rPr>
+              <a:t>Generate a latent variable z first.. Can be a compression or for prediction or more if you can think more..</a:t>
+            </a:r>
+          </a:p>
+          <a:p>
+            <a:endParaRPr lang="en-US" dirty="0">
+              <a:highlight>
+                <a:srgbClr val="FFFF00"/>
+              </a:highlight>
+            </a:endParaRPr>
           </a:p>
         </p:txBody>
       </p:sp>
@@ -4630,7 +4750,7 @@
         </p:blipFill>
         <p:spPr>
           <a:xfrm>
-            <a:off x="940750" y="1972698"/>
+            <a:off x="909220" y="1972698"/>
             <a:ext cx="10565067" cy="2751590"/>
           </a:xfrm>
         </p:spPr>
@@ -4664,7 +4784,11 @@
           <a:lstStyle/>
           <a:p>
             <a:r>
-              <a:rPr lang="en-US" dirty="0"/>
+              <a:rPr lang="en-US" dirty="0">
+                <a:highlight>
+                  <a:srgbClr val="00FF00"/>
+                </a:highlight>
+              </a:rPr>
               <a:t>Latent variable models map a random “latent” variable to create a new data sample</a:t>
             </a:r>
           </a:p>
@@ -5087,8 +5211,20 @@
             <a:pPr lvl="1"/>
             <a:r>
               <a:rPr lang="en-US" dirty="0"/>
-              <a:t>Can assign a probability to new data </a:t>
-            </a:r>
+              <a:t>Can assign a probability to new </a:t>
+            </a:r>
+            <a:r>
+              <a:rPr lang="en-US"/>
+              <a:t>data </a:t>
+            </a:r>
+          </a:p>
+          <a:p>
+            <a:pPr lvl="1"/>
+            <a:r>
+              <a:rPr lang="en-US"/>
+              <a:t>Same by conditional likelihood..</a:t>
+            </a:r>
+            <a:endParaRPr lang="en-US" dirty="0"/>
           </a:p>
         </p:txBody>
       </p:sp>
